--- a/lecNote/09_Project/etc/0923_sample_v1.pptx
+++ b/lecNote/09_Project/etc/0923_sample_v1.pptx
@@ -244,7 +244,7 @@
           <a:p>
             <a:fld id="{684ABEAC-FD1E-446D-854E-09142DFB339C}" type="datetimeFigureOut">
               <a:rPr lang="ko-KR" altLang="en-US" smtClean="0"/>
-              <a:t>2026-01-05</a:t>
+              <a:t>2026-09-22</a:t>
             </a:fld>
             <a:endParaRPr lang="ko-KR" altLang="en-US"/>
           </a:p>
@@ -409,7 +409,7 @@
           <a:p>
             <a:fld id="{E299D967-67B2-4132-B52D-A253871A1F24}" type="datetimeFigureOut">
               <a:rPr lang="ko-KR" altLang="en-US" smtClean="0"/>
-              <a:t>2026-01-05</a:t>
+              <a:t>2026-09-22</a:t>
             </a:fld>
             <a:endParaRPr lang="ko-KR" altLang="en-US"/>
           </a:p>
@@ -1251,7 +1251,7 @@
           <a:p>
             <a:fld id="{20303F18-CB98-4E85-A37B-EF5A4E6C8DE7}" type="datetime1">
               <a:rPr lang="ko-KR" altLang="en-US" smtClean="0"/>
-              <a:t>2026-01-05</a:t>
+              <a:t>2026-09-22</a:t>
             </a:fld>
             <a:endParaRPr lang="ko-KR" altLang="en-US"/>
           </a:p>
@@ -1424,7 +1424,7 @@
           <a:p>
             <a:fld id="{CCA16C65-58A5-46D5-A762-12670B92641B}" type="datetime1">
               <a:rPr lang="ko-KR" altLang="en-US" smtClean="0"/>
-              <a:t>2026-01-05</a:t>
+              <a:t>2026-09-22</a:t>
             </a:fld>
             <a:endParaRPr lang="ko-KR" altLang="en-US"/>
           </a:p>
@@ -1602,7 +1602,7 @@
           <a:p>
             <a:fld id="{2D09A68A-AC6E-41FE-B28C-2BB812CC2E01}" type="datetime1">
               <a:rPr lang="ko-KR" altLang="en-US" smtClean="0"/>
-              <a:t>2026-01-05</a:t>
+              <a:t>2026-09-22</a:t>
             </a:fld>
             <a:endParaRPr lang="ko-KR" altLang="en-US"/>
           </a:p>
@@ -1770,7 +1770,7 @@
           <a:p>
             <a:fld id="{690B8B09-A0F3-4880-B090-7FDDEE5B5065}" type="datetime1">
               <a:rPr lang="ko-KR" altLang="en-US" smtClean="0"/>
-              <a:t>2026-01-05</a:t>
+              <a:t>2026-09-22</a:t>
             </a:fld>
             <a:endParaRPr lang="ko-KR" altLang="en-US"/>
           </a:p>
@@ -2015,7 +2015,7 @@
           <a:p>
             <a:fld id="{82F7D3F4-816B-4FA6-91FC-91836ECD0E53}" type="datetime1">
               <a:rPr lang="ko-KR" altLang="en-US" smtClean="0"/>
-              <a:t>2026-01-05</a:t>
+              <a:t>2026-09-22</a:t>
             </a:fld>
             <a:endParaRPr lang="ko-KR" altLang="en-US"/>
           </a:p>
@@ -2300,7 +2300,7 @@
           <a:p>
             <a:fld id="{2FB9FCFF-984A-4549-AB53-391F9EC1244A}" type="datetime1">
               <a:rPr lang="ko-KR" altLang="en-US" smtClean="0"/>
-              <a:t>2026-01-05</a:t>
+              <a:t>2026-09-22</a:t>
             </a:fld>
             <a:endParaRPr lang="ko-KR" altLang="en-US"/>
           </a:p>
@@ -2719,7 +2719,7 @@
           <a:p>
             <a:fld id="{94618DE4-C4FE-4171-90C7-38CF01638033}" type="datetime1">
               <a:rPr lang="ko-KR" altLang="en-US" smtClean="0"/>
-              <a:t>2026-01-05</a:t>
+              <a:t>2026-09-22</a:t>
             </a:fld>
             <a:endParaRPr lang="ko-KR" altLang="en-US"/>
           </a:p>
@@ -2836,7 +2836,7 @@
           <a:p>
             <a:fld id="{33587621-9D18-4C20-9B84-3E938621A025}" type="datetime1">
               <a:rPr lang="ko-KR" altLang="en-US" smtClean="0"/>
-              <a:t>2026-01-05</a:t>
+              <a:t>2026-09-22</a:t>
             </a:fld>
             <a:endParaRPr lang="ko-KR" altLang="en-US"/>
           </a:p>
@@ -3281,7 +3281,7 @@
           <a:p>
             <a:fld id="{B517649B-2577-404C-858E-51E9DEBB2548}" type="datetime1">
               <a:rPr lang="ko-KR" altLang="en-US" smtClean="0"/>
-              <a:t>2026-01-05</a:t>
+              <a:t>2026-09-22</a:t>
             </a:fld>
             <a:endParaRPr lang="ko-KR" altLang="en-US"/>
           </a:p>
@@ -3533,7 +3533,7 @@
           <a:p>
             <a:fld id="{8D84C674-EF46-4F27-9E3E-4F6A170B0DC6}" type="datetime1">
               <a:rPr lang="ko-KR" altLang="en-US" smtClean="0"/>
-              <a:t>2026-01-05</a:t>
+              <a:t>2026-09-22</a:t>
             </a:fld>
             <a:endParaRPr lang="ko-KR" altLang="en-US"/>
           </a:p>
@@ -3744,7 +3744,7 @@
           <a:p>
             <a:fld id="{B40F11ED-9D7B-4CCE-A57D-CC1D7760FB25}" type="datetime1">
               <a:rPr lang="ko-KR" altLang="en-US" smtClean="0"/>
-              <a:t>2026-01-05</a:t>
+              <a:t>2026-09-22</a:t>
             </a:fld>
             <a:endParaRPr lang="ko-KR" altLang="en-US"/>
           </a:p>
@@ -4306,25 +4306,25 @@
               <a:t>2026</a:t>
             </a:r>
             <a:r>
-              <a:rPr lang="ko-KR" altLang="en-US" sz="1200" dirty="0">
+              <a:rPr lang="ko-KR" altLang="en-US" sz="1200">
                 <a:latin typeface="가는안상수체" pitchFamily="2" charset="-127"/>
                 <a:ea typeface="가는안상수체" pitchFamily="2" charset="-127"/>
               </a:rPr>
               <a:t>년</a:t>
             </a:r>
             <a:r>
-              <a:rPr lang="ko-KR" altLang="en-US" sz="2000" spc="-150" dirty="0">
+              <a:rPr lang="ko-KR" altLang="en-US" sz="2000" spc="-150">
                 <a:latin typeface="가는안상수체" pitchFamily="2" charset="-127"/>
                 <a:ea typeface="가는안상수체" pitchFamily="2" charset="-127"/>
               </a:rPr>
               <a:t> </a:t>
             </a:r>
             <a:r>
-              <a:rPr lang="en-US" altLang="ko-KR" sz="2000" spc="-150" dirty="0">
+              <a:rPr lang="en-US" altLang="ko-KR" sz="2000" spc="-150">
                 <a:latin typeface="가는안상수체" pitchFamily="2" charset="-127"/>
                 <a:ea typeface="가는안상수체" pitchFamily="2" charset="-127"/>
               </a:rPr>
-              <a:t>01</a:t>
+              <a:t>10</a:t>
             </a:r>
             <a:r>
               <a:rPr lang="ko-KR" altLang="en-US" sz="1200" spc="-150">
@@ -4346,7 +4346,7 @@
                 <a:latin typeface="가는안상수체" pitchFamily="2" charset="-127"/>
                 <a:ea typeface="가는안상수체" pitchFamily="2" charset="-127"/>
               </a:rPr>
-              <a:t> 05</a:t>
+              <a:t> 12</a:t>
             </a:r>
             <a:r>
               <a:rPr lang="ko-KR" altLang="en-US" sz="1200" spc="-150">
@@ -4390,7 +4390,7 @@
                 <a:latin typeface="가는안상수체" pitchFamily="2" charset="-127"/>
                 <a:ea typeface="가는안상수체" pitchFamily="2" charset="-127"/>
               </a:rPr>
-              <a:t> 15</a:t>
+              <a:t> 10</a:t>
             </a:r>
             <a:r>
               <a:rPr lang="ko-KR" altLang="en-US" sz="1200" spc="-150">
@@ -4412,10 +4412,10 @@
                 <a:latin typeface="가는안상수체" pitchFamily="2" charset="-127"/>
                 <a:ea typeface="가는안상수체" pitchFamily="2" charset="-127"/>
               </a:rPr>
-              <a:t>10</a:t>
-            </a:r>
-            <a:r>
-              <a:rPr lang="ko-KR" altLang="en-US" sz="1200" spc="-150" dirty="0">
+              <a:t>00</a:t>
+            </a:r>
+            <a:r>
+              <a:rPr lang="ko-KR" altLang="en-US" sz="1200" spc="-150">
                 <a:latin typeface="가는안상수체" pitchFamily="2" charset="-127"/>
                 <a:ea typeface="가는안상수체" pitchFamily="2" charset="-127"/>
                 <a:cs typeface="Arial Unicode MS" pitchFamily="50" charset="-127"/>
@@ -11837,7 +11837,7 @@
                 </a:solidFill>
                 <a:latin typeface="+mn-ea"/>
               </a:rPr>
-              <a:t>참고문헌 및 사용데이터 출천</a:t>
+              <a:t>참고문헌 및 사용데이터 출처</a:t>
             </a:r>
             <a:endParaRPr lang="en-US" altLang="ko-KR" sz="600" b="1" dirty="0">
               <a:solidFill>
